--- a/apresentacao/TST-GESTAO_Apresentacao.pptx
+++ b/apresentacao/TST-GESTAO_Apresentacao.pptx
@@ -5,24 +5,24 @@
     <p:sldMasterId id="2147483648" r:id="rId1"/>
   </p:sldMasterIdLst>
   <p:sldIdLst>
-    <p:sldId id="256" r:id="rId7"/>
-    <p:sldId id="257" r:id="rId8"/>
-    <p:sldId id="258" r:id="rId9"/>
-    <p:sldId id="259" r:id="rId10"/>
-    <p:sldId id="260" r:id="rId11"/>
-    <p:sldId id="261" r:id="rId12"/>
-    <p:sldId id="262" r:id="rId13"/>
-    <p:sldId id="263" r:id="rId14"/>
-    <p:sldId id="264" r:id="rId15"/>
-    <p:sldId id="265" r:id="rId16"/>
-    <p:sldId id="266" r:id="rId17"/>
-    <p:sldId id="267" r:id="rId18"/>
-    <p:sldId id="268" r:id="rId19"/>
-    <p:sldId id="269" r:id="rId20"/>
-    <p:sldId id="270" r:id="rId21"/>
-    <p:sldId id="271" r:id="rId22"/>
+    <p:sldId id="256" r:id="rId2"/>
+    <p:sldId id="257" r:id="rId3"/>
+    <p:sldId id="258" r:id="rId4"/>
+    <p:sldId id="259" r:id="rId5"/>
+    <p:sldId id="260" r:id="rId6"/>
+    <p:sldId id="261" r:id="rId7"/>
+    <p:sldId id="262" r:id="rId8"/>
+    <p:sldId id="263" r:id="rId9"/>
+    <p:sldId id="264" r:id="rId10"/>
+    <p:sldId id="265" r:id="rId11"/>
+    <p:sldId id="266" r:id="rId12"/>
+    <p:sldId id="267" r:id="rId13"/>
+    <p:sldId id="268" r:id="rId14"/>
+    <p:sldId id="269" r:id="rId15"/>
+    <p:sldId id="270" r:id="rId16"/>
+    <p:sldId id="271" r:id="rId17"/>
   </p:sldIdLst>
-  <p:sldSz cx="12191695" cy="6858000" type="screen4x3"/>
+  <p:sldSz cx="12192000" cy="6858000"/>
   <p:notesSz cx="6858000" cy="9144000"/>
   <p:defaultTextStyle>
     <a:defPPr>
@@ -119,6 +119,22 @@
       </a:defRPr>
     </a:lvl9pPr>
   </p:defaultTextStyle>
+  <p:extLst>
+    <p:ext uri="{EFAFB233-063F-42B5-8137-9DF3F51BA10A}">
+      <p15:sldGuideLst xmlns:p15="http://schemas.microsoft.com/office/powerpoint/2012/main">
+        <p15:guide id="1" orient="horz" pos="2160">
+          <p15:clr>
+            <a:srgbClr val="A4A3A4"/>
+          </p15:clr>
+        </p15:guide>
+        <p15:guide id="2" pos="2880">
+          <p15:clr>
+            <a:srgbClr val="A4A3A4"/>
+          </p15:clr>
+        </p15:guide>
+      </p15:sldGuideLst>
+    </p:ext>
+  </p:extLst>
 </p:presentation>
 </file>
 
@@ -160,10 +176,9 @@
           <a:lstStyle/>
           <a:p>
             <a:r>
-              <a:rPr lang="en-US" smtClean="0"/>
+              <a:rPr lang="en-US"/>
               <a:t>Click to edit Master title style</a:t>
             </a:r>
-            <a:endParaRPr lang="en-US"/>
           </a:p>
         </p:txBody>
       </p:sp>
@@ -279,10 +294,9 @@
           </a:lstStyle>
           <a:p>
             <a:r>
-              <a:rPr lang="en-US" smtClean="0"/>
+              <a:rPr lang="en-US"/>
               <a:t>Click to edit Master subtitle style</a:t>
             </a:r>
-            <a:endParaRPr lang="en-US"/>
           </a:p>
         </p:txBody>
       </p:sp>
@@ -303,7 +317,7 @@
           <a:p>
             <a:fld id="{5BCAD085-E8A6-8845-BD4E-CB4CCA059FC4}" type="datetimeFigureOut">
               <a:rPr lang="en-US" smtClean="0"/>
-              <a:t>1/27/13</a:t>
+              <a:t>10/20/2026</a:t>
             </a:fld>
             <a:endParaRPr lang="en-US"/>
           </a:p>
@@ -345,7 +359,7 @@
           <a:p>
             <a:fld id="{C1FF6DA9-008F-8B48-92A6-B652298478BF}" type="slidenum">
               <a:rPr lang="en-US" smtClean="0"/>
-              <a:t>‹#›</a:t>
+              <a:t>‹nº›</a:t>
             </a:fld>
             <a:endParaRPr lang="en-US"/>
           </a:p>
@@ -397,10 +411,9 @@
           <a:lstStyle/>
           <a:p>
             <a:r>
-              <a:rPr lang="en-US" smtClean="0"/>
+              <a:rPr lang="en-US"/>
               <a:t>Click to edit Master title style</a:t>
             </a:r>
-            <a:endParaRPr lang="en-US"/>
           </a:p>
         </p:txBody>
       </p:sp>
@@ -421,38 +434,37 @@
           <a:p>
             <a:pPr lvl="0"/>
             <a:r>
-              <a:rPr lang="en-US" smtClean="0"/>
+              <a:rPr lang="en-US"/>
               <a:t>Click to edit Master text styles</a:t>
             </a:r>
           </a:p>
           <a:p>
             <a:pPr lvl="1"/>
             <a:r>
-              <a:rPr lang="en-US" smtClean="0"/>
+              <a:rPr lang="en-US"/>
               <a:t>Second level</a:t>
             </a:r>
           </a:p>
           <a:p>
             <a:pPr lvl="2"/>
             <a:r>
-              <a:rPr lang="en-US" smtClean="0"/>
+              <a:rPr lang="en-US"/>
               <a:t>Third level</a:t>
             </a:r>
           </a:p>
           <a:p>
             <a:pPr lvl="3"/>
             <a:r>
-              <a:rPr lang="en-US" smtClean="0"/>
+              <a:rPr lang="en-US"/>
               <a:t>Fourth level</a:t>
             </a:r>
           </a:p>
           <a:p>
             <a:pPr lvl="4"/>
             <a:r>
-              <a:rPr lang="en-US" smtClean="0"/>
+              <a:rPr lang="en-US"/>
               <a:t>Fifth level</a:t>
             </a:r>
-            <a:endParaRPr lang="en-US"/>
           </a:p>
         </p:txBody>
       </p:sp>
@@ -473,7 +485,7 @@
           <a:p>
             <a:fld id="{5BCAD085-E8A6-8845-BD4E-CB4CCA059FC4}" type="datetimeFigureOut">
               <a:rPr lang="en-US" smtClean="0"/>
-              <a:t>1/27/13</a:t>
+              <a:t>10/20/2026</a:t>
             </a:fld>
             <a:endParaRPr lang="en-US"/>
           </a:p>
@@ -515,7 +527,7 @@
           <a:p>
             <a:fld id="{C1FF6DA9-008F-8B48-92A6-B652298478BF}" type="slidenum">
               <a:rPr lang="en-US" smtClean="0"/>
-              <a:t>‹#›</a:t>
+              <a:t>‹nº›</a:t>
             </a:fld>
             <a:endParaRPr lang="en-US"/>
           </a:p>
@@ -572,10 +584,9 @@
           <a:lstStyle/>
           <a:p>
             <a:r>
-              <a:rPr lang="en-US" smtClean="0"/>
+              <a:rPr lang="en-US"/>
               <a:t>Click to edit Master title style</a:t>
             </a:r>
-            <a:endParaRPr lang="en-US"/>
           </a:p>
         </p:txBody>
       </p:sp>
@@ -601,38 +612,37 @@
           <a:p>
             <a:pPr lvl="0"/>
             <a:r>
-              <a:rPr lang="en-US" smtClean="0"/>
+              <a:rPr lang="en-US"/>
               <a:t>Click to edit Master text styles</a:t>
             </a:r>
           </a:p>
           <a:p>
             <a:pPr lvl="1"/>
             <a:r>
-              <a:rPr lang="en-US" smtClean="0"/>
+              <a:rPr lang="en-US"/>
               <a:t>Second level</a:t>
             </a:r>
           </a:p>
           <a:p>
             <a:pPr lvl="2"/>
             <a:r>
-              <a:rPr lang="en-US" smtClean="0"/>
+              <a:rPr lang="en-US"/>
               <a:t>Third level</a:t>
             </a:r>
           </a:p>
           <a:p>
             <a:pPr lvl="3"/>
             <a:r>
-              <a:rPr lang="en-US" smtClean="0"/>
+              <a:rPr lang="en-US"/>
               <a:t>Fourth level</a:t>
             </a:r>
           </a:p>
           <a:p>
             <a:pPr lvl="4"/>
             <a:r>
-              <a:rPr lang="en-US" smtClean="0"/>
+              <a:rPr lang="en-US"/>
               <a:t>Fifth level</a:t>
             </a:r>
-            <a:endParaRPr lang="en-US"/>
           </a:p>
         </p:txBody>
       </p:sp>
@@ -653,7 +663,7 @@
           <a:p>
             <a:fld id="{5BCAD085-E8A6-8845-BD4E-CB4CCA059FC4}" type="datetimeFigureOut">
               <a:rPr lang="en-US" smtClean="0"/>
-              <a:t>1/27/13</a:t>
+              <a:t>10/20/2026</a:t>
             </a:fld>
             <a:endParaRPr lang="en-US"/>
           </a:p>
@@ -695,7 +705,7 @@
           <a:p>
             <a:fld id="{C1FF6DA9-008F-8B48-92A6-B652298478BF}" type="slidenum">
               <a:rPr lang="en-US" smtClean="0"/>
-              <a:t>‹#›</a:t>
+              <a:t>‹nº›</a:t>
             </a:fld>
             <a:endParaRPr lang="en-US"/>
           </a:p>
@@ -747,10 +757,9 @@
           <a:lstStyle/>
           <a:p>
             <a:r>
-              <a:rPr lang="en-US" smtClean="0"/>
+              <a:rPr lang="en-US"/>
               <a:t>Click to edit Master title style</a:t>
             </a:r>
-            <a:endParaRPr lang="en-US"/>
           </a:p>
         </p:txBody>
       </p:sp>
@@ -771,38 +780,37 @@
           <a:p>
             <a:pPr lvl="0"/>
             <a:r>
-              <a:rPr lang="en-US" smtClean="0"/>
+              <a:rPr lang="en-US"/>
               <a:t>Click to edit Master text styles</a:t>
             </a:r>
           </a:p>
           <a:p>
             <a:pPr lvl="1"/>
             <a:r>
-              <a:rPr lang="en-US" smtClean="0"/>
+              <a:rPr lang="en-US"/>
               <a:t>Second level</a:t>
             </a:r>
           </a:p>
           <a:p>
             <a:pPr lvl="2"/>
             <a:r>
-              <a:rPr lang="en-US" smtClean="0"/>
+              <a:rPr lang="en-US"/>
               <a:t>Third level</a:t>
             </a:r>
           </a:p>
           <a:p>
             <a:pPr lvl="3"/>
             <a:r>
-              <a:rPr lang="en-US" smtClean="0"/>
+              <a:rPr lang="en-US"/>
               <a:t>Fourth level</a:t>
             </a:r>
           </a:p>
           <a:p>
             <a:pPr lvl="4"/>
             <a:r>
-              <a:rPr lang="en-US" smtClean="0"/>
+              <a:rPr lang="en-US"/>
               <a:t>Fifth level</a:t>
             </a:r>
-            <a:endParaRPr lang="en-US"/>
           </a:p>
         </p:txBody>
       </p:sp>
@@ -823,7 +831,7 @@
           <a:p>
             <a:fld id="{5BCAD085-E8A6-8845-BD4E-CB4CCA059FC4}" type="datetimeFigureOut">
               <a:rPr lang="en-US" smtClean="0"/>
-              <a:t>1/27/13</a:t>
+              <a:t>10/20/2026</a:t>
             </a:fld>
             <a:endParaRPr lang="en-US"/>
           </a:p>
@@ -865,7 +873,7 @@
           <a:p>
             <a:fld id="{C1FF6DA9-008F-8B48-92A6-B652298478BF}" type="slidenum">
               <a:rPr lang="en-US" smtClean="0"/>
-              <a:t>‹#›</a:t>
+              <a:t>‹nº›</a:t>
             </a:fld>
             <a:endParaRPr lang="en-US"/>
           </a:p>
@@ -926,10 +934,9 @@
           </a:lstStyle>
           <a:p>
             <a:r>
-              <a:rPr lang="en-US" smtClean="0"/>
+              <a:rPr lang="en-US"/>
               <a:t>Click to edit Master title style</a:t>
             </a:r>
-            <a:endParaRPr lang="en-US"/>
           </a:p>
         </p:txBody>
       </p:sp>
@@ -1046,7 +1053,7 @@
           <a:p>
             <a:pPr lvl="0"/>
             <a:r>
-              <a:rPr lang="en-US" smtClean="0"/>
+              <a:rPr lang="en-US"/>
               <a:t>Click to edit Master text styles</a:t>
             </a:r>
           </a:p>
@@ -1069,7 +1076,7 @@
           <a:p>
             <a:fld id="{5BCAD085-E8A6-8845-BD4E-CB4CCA059FC4}" type="datetimeFigureOut">
               <a:rPr lang="en-US" smtClean="0"/>
-              <a:t>1/27/13</a:t>
+              <a:t>10/20/2026</a:t>
             </a:fld>
             <a:endParaRPr lang="en-US"/>
           </a:p>
@@ -1111,7 +1118,7 @@
           <a:p>
             <a:fld id="{C1FF6DA9-008F-8B48-92A6-B652298478BF}" type="slidenum">
               <a:rPr lang="en-US" smtClean="0"/>
-              <a:t>‹#›</a:t>
+              <a:t>‹nº›</a:t>
             </a:fld>
             <a:endParaRPr lang="en-US"/>
           </a:p>
@@ -1163,10 +1170,9 @@
           <a:lstStyle/>
           <a:p>
             <a:r>
-              <a:rPr lang="en-US" smtClean="0"/>
+              <a:rPr lang="en-US"/>
               <a:t>Click to edit Master title style</a:t>
             </a:r>
-            <a:endParaRPr lang="en-US"/>
           </a:p>
         </p:txBody>
       </p:sp>
@@ -1220,38 +1226,37 @@
           <a:p>
             <a:pPr lvl="0"/>
             <a:r>
-              <a:rPr lang="en-US" smtClean="0"/>
+              <a:rPr lang="en-US"/>
               <a:t>Click to edit Master text styles</a:t>
             </a:r>
           </a:p>
           <a:p>
             <a:pPr lvl="1"/>
             <a:r>
-              <a:rPr lang="en-US" smtClean="0"/>
+              <a:rPr lang="en-US"/>
               <a:t>Second level</a:t>
             </a:r>
           </a:p>
           <a:p>
             <a:pPr lvl="2"/>
             <a:r>
-              <a:rPr lang="en-US" smtClean="0"/>
+              <a:rPr lang="en-US"/>
               <a:t>Third level</a:t>
             </a:r>
           </a:p>
           <a:p>
             <a:pPr lvl="3"/>
             <a:r>
-              <a:rPr lang="en-US" smtClean="0"/>
+              <a:rPr lang="en-US"/>
               <a:t>Fourth level</a:t>
             </a:r>
           </a:p>
           <a:p>
             <a:pPr lvl="4"/>
             <a:r>
-              <a:rPr lang="en-US" smtClean="0"/>
+              <a:rPr lang="en-US"/>
               <a:t>Fifth level</a:t>
             </a:r>
-            <a:endParaRPr lang="en-US"/>
           </a:p>
         </p:txBody>
       </p:sp>
@@ -1305,38 +1310,37 @@
           <a:p>
             <a:pPr lvl="0"/>
             <a:r>
-              <a:rPr lang="en-US" smtClean="0"/>
+              <a:rPr lang="en-US"/>
               <a:t>Click to edit Master text styles</a:t>
             </a:r>
           </a:p>
           <a:p>
             <a:pPr lvl="1"/>
             <a:r>
-              <a:rPr lang="en-US" smtClean="0"/>
+              <a:rPr lang="en-US"/>
               <a:t>Second level</a:t>
             </a:r>
           </a:p>
           <a:p>
             <a:pPr lvl="2"/>
             <a:r>
-              <a:rPr lang="en-US" smtClean="0"/>
+              <a:rPr lang="en-US"/>
               <a:t>Third level</a:t>
             </a:r>
           </a:p>
           <a:p>
             <a:pPr lvl="3"/>
             <a:r>
-              <a:rPr lang="en-US" smtClean="0"/>
+              <a:rPr lang="en-US"/>
               <a:t>Fourth level</a:t>
             </a:r>
           </a:p>
           <a:p>
             <a:pPr lvl="4"/>
             <a:r>
-              <a:rPr lang="en-US" smtClean="0"/>
+              <a:rPr lang="en-US"/>
               <a:t>Fifth level</a:t>
             </a:r>
-            <a:endParaRPr lang="en-US"/>
           </a:p>
         </p:txBody>
       </p:sp>
@@ -1357,7 +1361,7 @@
           <a:p>
             <a:fld id="{5BCAD085-E8A6-8845-BD4E-CB4CCA059FC4}" type="datetimeFigureOut">
               <a:rPr lang="en-US" smtClean="0"/>
-              <a:t>1/27/13</a:t>
+              <a:t>10/20/2026</a:t>
             </a:fld>
             <a:endParaRPr lang="en-US"/>
           </a:p>
@@ -1399,7 +1403,7 @@
           <a:p>
             <a:fld id="{C1FF6DA9-008F-8B48-92A6-B652298478BF}" type="slidenum">
               <a:rPr lang="en-US" smtClean="0"/>
-              <a:t>‹#›</a:t>
+              <a:t>‹nº›</a:t>
             </a:fld>
             <a:endParaRPr lang="en-US"/>
           </a:p>
@@ -1455,10 +1459,9 @@
           </a:lstStyle>
           <a:p>
             <a:r>
-              <a:rPr lang="en-US" smtClean="0"/>
+              <a:rPr lang="en-US"/>
               <a:t>Click to edit Master title style</a:t>
             </a:r>
-            <a:endParaRPr lang="en-US"/>
           </a:p>
         </p:txBody>
       </p:sp>
@@ -1521,7 +1524,7 @@
           <a:p>
             <a:pPr lvl="0"/>
             <a:r>
-              <a:rPr lang="en-US" smtClean="0"/>
+              <a:rPr lang="en-US"/>
               <a:t>Click to edit Master text styles</a:t>
             </a:r>
           </a:p>
@@ -1577,38 +1580,37 @@
           <a:p>
             <a:pPr lvl="0"/>
             <a:r>
-              <a:rPr lang="en-US" smtClean="0"/>
+              <a:rPr lang="en-US"/>
               <a:t>Click to edit Master text styles</a:t>
             </a:r>
           </a:p>
           <a:p>
             <a:pPr lvl="1"/>
             <a:r>
-              <a:rPr lang="en-US" smtClean="0"/>
+              <a:rPr lang="en-US"/>
               <a:t>Second level</a:t>
             </a:r>
           </a:p>
           <a:p>
             <a:pPr lvl="2"/>
             <a:r>
-              <a:rPr lang="en-US" smtClean="0"/>
+              <a:rPr lang="en-US"/>
               <a:t>Third level</a:t>
             </a:r>
           </a:p>
           <a:p>
             <a:pPr lvl="3"/>
             <a:r>
-              <a:rPr lang="en-US" smtClean="0"/>
+              <a:rPr lang="en-US"/>
               <a:t>Fourth level</a:t>
             </a:r>
           </a:p>
           <a:p>
             <a:pPr lvl="4"/>
             <a:r>
-              <a:rPr lang="en-US" smtClean="0"/>
+              <a:rPr lang="en-US"/>
               <a:t>Fifth level</a:t>
             </a:r>
-            <a:endParaRPr lang="en-US"/>
           </a:p>
         </p:txBody>
       </p:sp>
@@ -1671,7 +1673,7 @@
           <a:p>
             <a:pPr lvl="0"/>
             <a:r>
-              <a:rPr lang="en-US" smtClean="0"/>
+              <a:rPr lang="en-US"/>
               <a:t>Click to edit Master text styles</a:t>
             </a:r>
           </a:p>
@@ -1727,38 +1729,37 @@
           <a:p>
             <a:pPr lvl="0"/>
             <a:r>
-              <a:rPr lang="en-US" smtClean="0"/>
+              <a:rPr lang="en-US"/>
               <a:t>Click to edit Master text styles</a:t>
             </a:r>
           </a:p>
           <a:p>
             <a:pPr lvl="1"/>
             <a:r>
-              <a:rPr lang="en-US" smtClean="0"/>
+              <a:rPr lang="en-US"/>
               <a:t>Second level</a:t>
             </a:r>
           </a:p>
           <a:p>
             <a:pPr lvl="2"/>
             <a:r>
-              <a:rPr lang="en-US" smtClean="0"/>
+              <a:rPr lang="en-US"/>
               <a:t>Third level</a:t>
             </a:r>
           </a:p>
           <a:p>
             <a:pPr lvl="3"/>
             <a:r>
-              <a:rPr lang="en-US" smtClean="0"/>
+              <a:rPr lang="en-US"/>
               <a:t>Fourth level</a:t>
             </a:r>
           </a:p>
           <a:p>
             <a:pPr lvl="4"/>
             <a:r>
-              <a:rPr lang="en-US" smtClean="0"/>
+              <a:rPr lang="en-US"/>
               <a:t>Fifth level</a:t>
             </a:r>
-            <a:endParaRPr lang="en-US"/>
           </a:p>
         </p:txBody>
       </p:sp>
@@ -1779,7 +1780,7 @@
           <a:p>
             <a:fld id="{5BCAD085-E8A6-8845-BD4E-CB4CCA059FC4}" type="datetimeFigureOut">
               <a:rPr lang="en-US" smtClean="0"/>
-              <a:t>1/27/13</a:t>
+              <a:t>10/20/2026</a:t>
             </a:fld>
             <a:endParaRPr lang="en-US"/>
           </a:p>
@@ -1821,7 +1822,7 @@
           <a:p>
             <a:fld id="{C1FF6DA9-008F-8B48-92A6-B652298478BF}" type="slidenum">
               <a:rPr lang="en-US" smtClean="0"/>
-              <a:t>‹#›</a:t>
+              <a:t>‹nº›</a:t>
             </a:fld>
             <a:endParaRPr lang="en-US"/>
           </a:p>
@@ -1873,10 +1874,9 @@
           <a:lstStyle/>
           <a:p>
             <a:r>
-              <a:rPr lang="en-US" smtClean="0"/>
+              <a:rPr lang="en-US"/>
               <a:t>Click to edit Master title style</a:t>
             </a:r>
-            <a:endParaRPr lang="en-US"/>
           </a:p>
         </p:txBody>
       </p:sp>
@@ -1897,7 +1897,7 @@
           <a:p>
             <a:fld id="{5BCAD085-E8A6-8845-BD4E-CB4CCA059FC4}" type="datetimeFigureOut">
               <a:rPr lang="en-US" smtClean="0"/>
-              <a:t>1/27/13</a:t>
+              <a:t>10/20/2026</a:t>
             </a:fld>
             <a:endParaRPr lang="en-US"/>
           </a:p>
@@ -1939,7 +1939,7 @@
           <a:p>
             <a:fld id="{C1FF6DA9-008F-8B48-92A6-B652298478BF}" type="slidenum">
               <a:rPr lang="en-US" smtClean="0"/>
-              <a:t>‹#›</a:t>
+              <a:t>‹nº›</a:t>
             </a:fld>
             <a:endParaRPr lang="en-US"/>
           </a:p>
@@ -1992,7 +1992,7 @@
           <a:p>
             <a:fld id="{5BCAD085-E8A6-8845-BD4E-CB4CCA059FC4}" type="datetimeFigureOut">
               <a:rPr lang="en-US" smtClean="0"/>
-              <a:t>1/27/13</a:t>
+              <a:t>10/20/2026</a:t>
             </a:fld>
             <a:endParaRPr lang="en-US"/>
           </a:p>
@@ -2034,7 +2034,7 @@
           <a:p>
             <a:fld id="{C1FF6DA9-008F-8B48-92A6-B652298478BF}" type="slidenum">
               <a:rPr lang="en-US" smtClean="0"/>
-              <a:t>‹#›</a:t>
+              <a:t>‹nº›</a:t>
             </a:fld>
             <a:endParaRPr lang="en-US"/>
           </a:p>
@@ -2095,10 +2095,9 @@
           </a:lstStyle>
           <a:p>
             <a:r>
-              <a:rPr lang="en-US" smtClean="0"/>
+              <a:rPr lang="en-US"/>
               <a:t>Click to edit Master title style</a:t>
             </a:r>
-            <a:endParaRPr lang="en-US"/>
           </a:p>
         </p:txBody>
       </p:sp>
@@ -2152,38 +2151,37 @@
           <a:p>
             <a:pPr lvl="0"/>
             <a:r>
-              <a:rPr lang="en-US" smtClean="0"/>
+              <a:rPr lang="en-US"/>
               <a:t>Click to edit Master text styles</a:t>
             </a:r>
           </a:p>
           <a:p>
             <a:pPr lvl="1"/>
             <a:r>
-              <a:rPr lang="en-US" smtClean="0"/>
+              <a:rPr lang="en-US"/>
               <a:t>Second level</a:t>
             </a:r>
           </a:p>
           <a:p>
             <a:pPr lvl="2"/>
             <a:r>
-              <a:rPr lang="en-US" smtClean="0"/>
+              <a:rPr lang="en-US"/>
               <a:t>Third level</a:t>
             </a:r>
           </a:p>
           <a:p>
             <a:pPr lvl="3"/>
             <a:r>
-              <a:rPr lang="en-US" smtClean="0"/>
+              <a:rPr lang="en-US"/>
               <a:t>Fourth level</a:t>
             </a:r>
           </a:p>
           <a:p>
             <a:pPr lvl="4"/>
             <a:r>
-              <a:rPr lang="en-US" smtClean="0"/>
+              <a:rPr lang="en-US"/>
               <a:t>Fifth level</a:t>
             </a:r>
-            <a:endParaRPr lang="en-US"/>
           </a:p>
         </p:txBody>
       </p:sp>
@@ -2246,7 +2244,7 @@
           <a:p>
             <a:pPr lvl="0"/>
             <a:r>
-              <a:rPr lang="en-US" smtClean="0"/>
+              <a:rPr lang="en-US"/>
               <a:t>Click to edit Master text styles</a:t>
             </a:r>
           </a:p>
@@ -2269,7 +2267,7 @@
           <a:p>
             <a:fld id="{5BCAD085-E8A6-8845-BD4E-CB4CCA059FC4}" type="datetimeFigureOut">
               <a:rPr lang="en-US" smtClean="0"/>
-              <a:t>1/27/13</a:t>
+              <a:t>10/20/2026</a:t>
             </a:fld>
             <a:endParaRPr lang="en-US"/>
           </a:p>
@@ -2311,7 +2309,7 @@
           <a:p>
             <a:fld id="{C1FF6DA9-008F-8B48-92A6-B652298478BF}" type="slidenum">
               <a:rPr lang="en-US" smtClean="0"/>
-              <a:t>‹#›</a:t>
+              <a:t>‹nº›</a:t>
             </a:fld>
             <a:endParaRPr lang="en-US"/>
           </a:p>
@@ -2372,10 +2370,9 @@
           </a:lstStyle>
           <a:p>
             <a:r>
-              <a:rPr lang="en-US" smtClean="0"/>
+              <a:rPr lang="en-US"/>
               <a:t>Click to edit Master title style</a:t>
             </a:r>
-            <a:endParaRPr lang="en-US"/>
           </a:p>
         </p:txBody>
       </p:sp>
@@ -2499,7 +2496,7 @@
           <a:p>
             <a:pPr lvl="0"/>
             <a:r>
-              <a:rPr lang="en-US" smtClean="0"/>
+              <a:rPr lang="en-US"/>
               <a:t>Click to edit Master text styles</a:t>
             </a:r>
           </a:p>
@@ -2522,7 +2519,7 @@
           <a:p>
             <a:fld id="{5BCAD085-E8A6-8845-BD4E-CB4CCA059FC4}" type="datetimeFigureOut">
               <a:rPr lang="en-US" smtClean="0"/>
-              <a:t>1/27/13</a:t>
+              <a:t>10/20/2026</a:t>
             </a:fld>
             <a:endParaRPr lang="en-US"/>
           </a:p>
@@ -2564,7 +2561,7 @@
           <a:p>
             <a:fld id="{C1FF6DA9-008F-8B48-92A6-B652298478BF}" type="slidenum">
               <a:rPr lang="en-US" smtClean="0"/>
-              <a:t>‹#›</a:t>
+              <a:t>‹nº›</a:t>
             </a:fld>
             <a:endParaRPr lang="en-US"/>
           </a:p>
@@ -2631,10 +2628,9 @@
           <a:lstStyle/>
           <a:p>
             <a:r>
-              <a:rPr lang="en-US" smtClean="0"/>
+              <a:rPr lang="en-US"/>
               <a:t>Click to edit Master title style</a:t>
             </a:r>
-            <a:endParaRPr lang="en-US"/>
           </a:p>
         </p:txBody>
       </p:sp>
@@ -2665,38 +2661,37 @@
           <a:p>
             <a:pPr lvl="0"/>
             <a:r>
-              <a:rPr lang="en-US" smtClean="0"/>
+              <a:rPr lang="en-US"/>
               <a:t>Click to edit Master text styles</a:t>
             </a:r>
           </a:p>
           <a:p>
             <a:pPr lvl="1"/>
             <a:r>
-              <a:rPr lang="en-US" smtClean="0"/>
+              <a:rPr lang="en-US"/>
               <a:t>Second level</a:t>
             </a:r>
           </a:p>
           <a:p>
             <a:pPr lvl="2"/>
             <a:r>
-              <a:rPr lang="en-US" smtClean="0"/>
+              <a:rPr lang="en-US"/>
               <a:t>Third level</a:t>
             </a:r>
           </a:p>
           <a:p>
             <a:pPr lvl="3"/>
             <a:r>
-              <a:rPr lang="en-US" smtClean="0"/>
+              <a:rPr lang="en-US"/>
               <a:t>Fourth level</a:t>
             </a:r>
           </a:p>
           <a:p>
             <a:pPr lvl="4"/>
             <a:r>
-              <a:rPr lang="en-US" smtClean="0"/>
+              <a:rPr lang="en-US"/>
               <a:t>Fifth level</a:t>
             </a:r>
-            <a:endParaRPr lang="en-US"/>
           </a:p>
         </p:txBody>
       </p:sp>
@@ -2735,7 +2730,7 @@
           <a:p>
             <a:fld id="{5BCAD085-E8A6-8845-BD4E-CB4CCA059FC4}" type="datetimeFigureOut">
               <a:rPr lang="en-US" smtClean="0"/>
-              <a:t>1/27/13</a:t>
+              <a:t>10/20/2026</a:t>
             </a:fld>
             <a:endParaRPr lang="en-US"/>
           </a:p>
@@ -2813,7 +2808,7 @@
           <a:p>
             <a:fld id="{C1FF6DA9-008F-8B48-92A6-B652298478BF}" type="slidenum">
               <a:rPr lang="en-US" smtClean="0"/>
-              <a:t>‹#›</a:t>
+              <a:t>‹nº›</a:t>
             </a:fld>
             <a:endParaRPr lang="en-US"/>
           </a:p>
@@ -3094,7 +3089,7 @@
 </file>
 
 <file path=ppt/slides/slide1.xml><?xml version="1.0" encoding="utf-8"?>
-<p:sld xmlns:a="http://schemas.openxmlformats.org/drawingml/2006/main" xmlns:p="http://schemas.openxmlformats.org/presentationml/2006/main" xmlns:r="http://schemas.openxmlformats.org/officeDocument/2006/relationships">
+<p:sld xmlns:a="http://schemas.openxmlformats.org/drawingml/2006/main" xmlns:r="http://schemas.openxmlformats.org/officeDocument/2006/relationships" xmlns:p="http://schemas.openxmlformats.org/presentationml/2006/main">
   <p:cSld>
     <p:bg>
       <p:bgPr>
@@ -3110,7 +3105,14 @@
         <p:cNvGrpSpPr/>
         <p:nvPr/>
       </p:nvGrpSpPr>
-      <p:grpSpPr/>
+      <p:grpSpPr>
+        <a:xfrm>
+          <a:off x="0" y="0"/>
+          <a:ext cx="0" cy="0"/>
+          <a:chOff x="0" y="0"/>
+          <a:chExt cx="0" cy="0"/>
+        </a:xfrm>
+      </p:grpSpPr>
       <p:pic>
         <p:nvPicPr>
           <p:cNvPr id="2" name="Picture 1" descr="bg.jpg"/>
@@ -3238,7 +3240,7 @@
         <p:spPr>
           <a:xfrm>
             <a:off x="457200" y="6126480"/>
-            <a:ext cx="11247120" cy="457200"/>
+            <a:ext cx="11247120" cy="292388"/>
           </a:xfrm>
           <a:prstGeom prst="rect">
             <a:avLst/>
@@ -3253,14 +3255,38 @@
           <a:p>
             <a:pPr algn="ctr"/>
             <a:r>
-              <a:rPr sz="1300" b="0">
+              <a:rPr sz="1300" b="0" dirty="0" err="1">
                 <a:solidFill>
                   <a:srgbClr val="0B1220"/>
                 </a:solidFill>
                 <a:latin typeface="Segoe UI"/>
               </a:rPr>
-              <a:t>Apresentação demonstrativa · dados fictícios</a:t>
-            </a:r>
+              <a:t>Apresentação</a:t>
+            </a:r>
+            <a:r>
+              <a:rPr sz="1300" b="0" dirty="0">
+                <a:solidFill>
+                  <a:srgbClr val="0B1220"/>
+                </a:solidFill>
+                <a:latin typeface="Segoe UI"/>
+              </a:rPr>
+              <a:t> </a:t>
+            </a:r>
+            <a:r>
+              <a:rPr sz="1300" b="0" dirty="0" err="1">
+                <a:solidFill>
+                  <a:srgbClr val="0B1220"/>
+                </a:solidFill>
+                <a:latin typeface="Segoe UI"/>
+              </a:rPr>
+              <a:t>demonstrativa</a:t>
+            </a:r>
+            <a:endParaRPr sz="1300" b="0" dirty="0">
+              <a:solidFill>
+                <a:srgbClr val="0B1220"/>
+              </a:solidFill>
+              <a:latin typeface="Segoe UI"/>
+            </a:endParaRPr>
           </a:p>
         </p:txBody>
       </p:sp>
@@ -3273,7 +3299,7 @@
 </file>
 
 <file path=ppt/slides/slide10.xml><?xml version="1.0" encoding="utf-8"?>
-<p:sld xmlns:a="http://schemas.openxmlformats.org/drawingml/2006/main" xmlns:p="http://schemas.openxmlformats.org/presentationml/2006/main" xmlns:r="http://schemas.openxmlformats.org/officeDocument/2006/relationships">
+<p:sld xmlns:a="http://schemas.openxmlformats.org/drawingml/2006/main" xmlns:r="http://schemas.openxmlformats.org/officeDocument/2006/relationships" xmlns:p="http://schemas.openxmlformats.org/presentationml/2006/main">
   <p:cSld>
     <p:bg>
       <p:bgPr>
@@ -3289,7 +3315,14 @@
         <p:cNvGrpSpPr/>
         <p:nvPr/>
       </p:nvGrpSpPr>
-      <p:grpSpPr/>
+      <p:grpSpPr>
+        <a:xfrm>
+          <a:off x="0" y="0"/>
+          <a:ext cx="0" cy="0"/>
+          <a:chOff x="0" y="0"/>
+          <a:chExt cx="0" cy="0"/>
+        </a:xfrm>
+      </p:grpSpPr>
       <p:sp>
         <p:nvSpPr>
           <p:cNvPr id="2" name="Rectangle 1"/>
@@ -3330,6 +3363,7 @@
           <a:lstStyle/>
           <a:p>
             <a:pPr algn="ctr"/>
+            <a:endParaRPr/>
           </a:p>
         </p:txBody>
       </p:sp>
@@ -3482,15 +3516,6 @@
                 <a:spcPts val="1000"/>
               </a:spcAft>
             </a:pPr>
-            <a:r>
-              <a:rPr sz="1400" b="0">
-                <a:solidFill>
-                  <a:srgbClr val="0B1220"/>
-                </a:solidFill>
-                <a:latin typeface="Segoe UI"/>
-              </a:rPr>
-              <a:t/>
-            </a:r>
             <a:r>
               <a:rPr sz="1500">
                 <a:solidFill>
@@ -3544,7 +3569,7 @@
 </file>
 
 <file path=ppt/slides/slide11.xml><?xml version="1.0" encoding="utf-8"?>
-<p:sld xmlns:a="http://schemas.openxmlformats.org/drawingml/2006/main" xmlns:p="http://schemas.openxmlformats.org/presentationml/2006/main" xmlns:r="http://schemas.openxmlformats.org/officeDocument/2006/relationships">
+<p:sld xmlns:a="http://schemas.openxmlformats.org/drawingml/2006/main" xmlns:r="http://schemas.openxmlformats.org/officeDocument/2006/relationships" xmlns:p="http://schemas.openxmlformats.org/presentationml/2006/main">
   <p:cSld>
     <p:bg>
       <p:bgPr>
@@ -3560,7 +3585,14 @@
         <p:cNvGrpSpPr/>
         <p:nvPr/>
       </p:nvGrpSpPr>
-      <p:grpSpPr/>
+      <p:grpSpPr>
+        <a:xfrm>
+          <a:off x="0" y="0"/>
+          <a:ext cx="0" cy="0"/>
+          <a:chOff x="0" y="0"/>
+          <a:chExt cx="0" cy="0"/>
+        </a:xfrm>
+      </p:grpSpPr>
       <p:sp>
         <p:nvSpPr>
           <p:cNvPr id="2" name="Rectangle 1"/>
@@ -3601,6 +3633,7 @@
           <a:lstStyle/>
           <a:p>
             <a:pPr algn="ctr"/>
+            <a:endParaRPr/>
           </a:p>
         </p:txBody>
       </p:sp>
@@ -3753,15 +3786,6 @@
                 <a:spcPts val="1000"/>
               </a:spcAft>
             </a:pPr>
-            <a:r>
-              <a:rPr sz="1400" b="0">
-                <a:solidFill>
-                  <a:srgbClr val="0B1220"/>
-                </a:solidFill>
-                <a:latin typeface="Segoe UI"/>
-              </a:rPr>
-              <a:t/>
-            </a:r>
             <a:r>
               <a:rPr sz="1500">
                 <a:solidFill>
@@ -3815,7 +3839,7 @@
 </file>
 
 <file path=ppt/slides/slide12.xml><?xml version="1.0" encoding="utf-8"?>
-<p:sld xmlns:a="http://schemas.openxmlformats.org/drawingml/2006/main" xmlns:p="http://schemas.openxmlformats.org/presentationml/2006/main" xmlns:r="http://schemas.openxmlformats.org/officeDocument/2006/relationships">
+<p:sld xmlns:a="http://schemas.openxmlformats.org/drawingml/2006/main" xmlns:r="http://schemas.openxmlformats.org/officeDocument/2006/relationships" xmlns:p="http://schemas.openxmlformats.org/presentationml/2006/main">
   <p:cSld>
     <p:bg>
       <p:bgPr>
@@ -3831,7 +3855,14 @@
         <p:cNvGrpSpPr/>
         <p:nvPr/>
       </p:nvGrpSpPr>
-      <p:grpSpPr/>
+      <p:grpSpPr>
+        <a:xfrm>
+          <a:off x="0" y="0"/>
+          <a:ext cx="0" cy="0"/>
+          <a:chOff x="0" y="0"/>
+          <a:chExt cx="0" cy="0"/>
+        </a:xfrm>
+      </p:grpSpPr>
       <p:sp>
         <p:nvSpPr>
           <p:cNvPr id="2" name="Rectangle 1"/>
@@ -3872,6 +3903,7 @@
           <a:lstStyle/>
           <a:p>
             <a:pPr algn="ctr"/>
+            <a:endParaRPr/>
           </a:p>
         </p:txBody>
       </p:sp>
@@ -4024,15 +4056,6 @@
                 <a:spcPts val="1000"/>
               </a:spcAft>
             </a:pPr>
-            <a:r>
-              <a:rPr sz="1400" b="0">
-                <a:solidFill>
-                  <a:srgbClr val="0B1220"/>
-                </a:solidFill>
-                <a:latin typeface="Segoe UI"/>
-              </a:rPr>
-              <a:t/>
-            </a:r>
             <a:r>
               <a:rPr sz="1500">
                 <a:solidFill>
@@ -4070,7 +4093,7 @@
 </file>
 
 <file path=ppt/slides/slide13.xml><?xml version="1.0" encoding="utf-8"?>
-<p:sld xmlns:a="http://schemas.openxmlformats.org/drawingml/2006/main" xmlns:p="http://schemas.openxmlformats.org/presentationml/2006/main" xmlns:r="http://schemas.openxmlformats.org/officeDocument/2006/relationships">
+<p:sld xmlns:a="http://schemas.openxmlformats.org/drawingml/2006/main" xmlns:r="http://schemas.openxmlformats.org/officeDocument/2006/relationships" xmlns:p="http://schemas.openxmlformats.org/presentationml/2006/main">
   <p:cSld>
     <p:bg>
       <p:bgPr>
@@ -4086,7 +4109,14 @@
         <p:cNvGrpSpPr/>
         <p:nvPr/>
       </p:nvGrpSpPr>
-      <p:grpSpPr/>
+      <p:grpSpPr>
+        <a:xfrm>
+          <a:off x="0" y="0"/>
+          <a:ext cx="0" cy="0"/>
+          <a:chOff x="0" y="0"/>
+          <a:chExt cx="0" cy="0"/>
+        </a:xfrm>
+      </p:grpSpPr>
       <p:sp>
         <p:nvSpPr>
           <p:cNvPr id="2" name="Rectangle 1"/>
@@ -4127,6 +4157,7 @@
           <a:lstStyle/>
           <a:p>
             <a:pPr algn="ctr"/>
+            <a:endParaRPr/>
           </a:p>
         </p:txBody>
       </p:sp>
@@ -4279,15 +4310,6 @@
                 <a:spcPts val="1000"/>
               </a:spcAft>
             </a:pPr>
-            <a:r>
-              <a:rPr sz="1400" b="0">
-                <a:solidFill>
-                  <a:srgbClr val="0B1220"/>
-                </a:solidFill>
-                <a:latin typeface="Segoe UI"/>
-              </a:rPr>
-              <a:t/>
-            </a:r>
             <a:r>
               <a:rPr sz="1500">
                 <a:solidFill>
@@ -4341,7 +4363,7 @@
 </file>
 
 <file path=ppt/slides/slide14.xml><?xml version="1.0" encoding="utf-8"?>
-<p:sld xmlns:a="http://schemas.openxmlformats.org/drawingml/2006/main" xmlns:p="http://schemas.openxmlformats.org/presentationml/2006/main" xmlns:r="http://schemas.openxmlformats.org/officeDocument/2006/relationships">
+<p:sld xmlns:a="http://schemas.openxmlformats.org/drawingml/2006/main" xmlns:r="http://schemas.openxmlformats.org/officeDocument/2006/relationships" xmlns:p="http://schemas.openxmlformats.org/presentationml/2006/main">
   <p:cSld>
     <p:bg>
       <p:bgPr>
@@ -4357,7 +4379,14 @@
         <p:cNvGrpSpPr/>
         <p:nvPr/>
       </p:nvGrpSpPr>
-      <p:grpSpPr/>
+      <p:grpSpPr>
+        <a:xfrm>
+          <a:off x="0" y="0"/>
+          <a:ext cx="0" cy="0"/>
+          <a:chOff x="0" y="0"/>
+          <a:chExt cx="0" cy="0"/>
+        </a:xfrm>
+      </p:grpSpPr>
       <p:sp>
         <p:nvSpPr>
           <p:cNvPr id="2" name="Rectangle 1"/>
@@ -4398,6 +4427,7 @@
           <a:lstStyle/>
           <a:p>
             <a:pPr algn="ctr"/>
+            <a:endParaRPr/>
           </a:p>
         </p:txBody>
       </p:sp>
@@ -4550,15 +4580,6 @@
                 <a:spcPts val="1000"/>
               </a:spcAft>
             </a:pPr>
-            <a:r>
-              <a:rPr sz="1400" b="0">
-                <a:solidFill>
-                  <a:srgbClr val="0B1220"/>
-                </a:solidFill>
-                <a:latin typeface="Segoe UI"/>
-              </a:rPr>
-              <a:t/>
-            </a:r>
             <a:r>
               <a:rPr sz="1500">
                 <a:solidFill>
@@ -4612,7 +4633,7 @@
 </file>
 
 <file path=ppt/slides/slide15.xml><?xml version="1.0" encoding="utf-8"?>
-<p:sld xmlns:a="http://schemas.openxmlformats.org/drawingml/2006/main" xmlns:p="http://schemas.openxmlformats.org/presentationml/2006/main" xmlns:r="http://schemas.openxmlformats.org/officeDocument/2006/relationships">
+<p:sld xmlns:a="http://schemas.openxmlformats.org/drawingml/2006/main" xmlns:r="http://schemas.openxmlformats.org/officeDocument/2006/relationships" xmlns:p="http://schemas.openxmlformats.org/presentationml/2006/main">
   <p:cSld>
     <p:bg>
       <p:bgPr>
@@ -4628,7 +4649,14 @@
         <p:cNvGrpSpPr/>
         <p:nvPr/>
       </p:nvGrpSpPr>
-      <p:grpSpPr/>
+      <p:grpSpPr>
+        <a:xfrm>
+          <a:off x="0" y="0"/>
+          <a:ext cx="0" cy="0"/>
+          <a:chOff x="0" y="0"/>
+          <a:chExt cx="0" cy="0"/>
+        </a:xfrm>
+      </p:grpSpPr>
       <p:sp>
         <p:nvSpPr>
           <p:cNvPr id="2" name="Rectangle 1"/>
@@ -4669,6 +4697,7 @@
           <a:lstStyle/>
           <a:p>
             <a:pPr algn="ctr"/>
+            <a:endParaRPr/>
           </a:p>
         </p:txBody>
       </p:sp>
@@ -4821,15 +4850,6 @@
                 <a:spcPts val="1000"/>
               </a:spcAft>
             </a:pPr>
-            <a:r>
-              <a:rPr sz="1400" b="0">
-                <a:solidFill>
-                  <a:srgbClr val="0B1220"/>
-                </a:solidFill>
-                <a:latin typeface="Segoe UI"/>
-              </a:rPr>
-              <a:t/>
-            </a:r>
             <a:r>
               <a:rPr sz="1500">
                 <a:solidFill>
@@ -4883,7 +4903,7 @@
 </file>
 
 <file path=ppt/slides/slide16.xml><?xml version="1.0" encoding="utf-8"?>
-<p:sld xmlns:a="http://schemas.openxmlformats.org/drawingml/2006/main" xmlns:p="http://schemas.openxmlformats.org/presentationml/2006/main" xmlns:r="http://schemas.openxmlformats.org/officeDocument/2006/relationships">
+<p:sld xmlns:a="http://schemas.openxmlformats.org/drawingml/2006/main" xmlns:r="http://schemas.openxmlformats.org/officeDocument/2006/relationships" xmlns:p="http://schemas.openxmlformats.org/presentationml/2006/main">
   <p:cSld>
     <p:bg>
       <p:bgPr>
@@ -4899,7 +4919,14 @@
         <p:cNvGrpSpPr/>
         <p:nvPr/>
       </p:nvGrpSpPr>
-      <p:grpSpPr/>
+      <p:grpSpPr>
+        <a:xfrm>
+          <a:off x="0" y="0"/>
+          <a:ext cx="0" cy="0"/>
+          <a:chOff x="0" y="0"/>
+          <a:chExt cx="0" cy="0"/>
+        </a:xfrm>
+      </p:grpSpPr>
       <p:pic>
         <p:nvPicPr>
           <p:cNvPr id="2" name="Picture 1" descr="bg.jpg"/>
@@ -5027,7 +5054,7 @@
         <p:spPr>
           <a:xfrm>
             <a:off x="457200" y="6126480"/>
-            <a:ext cx="11247120" cy="457200"/>
+            <a:ext cx="11247120" cy="292388"/>
           </a:xfrm>
           <a:prstGeom prst="rect">
             <a:avLst/>
@@ -5042,14 +5069,83 @@
           <a:p>
             <a:pPr algn="ctr"/>
             <a:r>
-              <a:rPr sz="1300" b="0">
+              <a:rPr sz="1300" b="0" dirty="0">
                 <a:solidFill>
                   <a:srgbClr val="0B1220"/>
                 </a:solidFill>
                 <a:latin typeface="Segoe UI"/>
               </a:rPr>
-              <a:t>Abra pelo atalho TST-GESTÃO · Primeiro acesso: admin / admin</a:t>
-            </a:r>
+              <a:t>Abra </a:t>
+            </a:r>
+            <a:r>
+              <a:rPr sz="1300" b="0" dirty="0" err="1">
+                <a:solidFill>
+                  <a:srgbClr val="0B1220"/>
+                </a:solidFill>
+                <a:latin typeface="Segoe UI"/>
+              </a:rPr>
+              <a:t>pelo</a:t>
+            </a:r>
+            <a:r>
+              <a:rPr sz="1300" b="0" dirty="0">
+                <a:solidFill>
+                  <a:srgbClr val="0B1220"/>
+                </a:solidFill>
+                <a:latin typeface="Segoe UI"/>
+              </a:rPr>
+              <a:t> </a:t>
+            </a:r>
+            <a:r>
+              <a:rPr sz="1300" b="0" dirty="0" err="1">
+                <a:solidFill>
+                  <a:srgbClr val="0B1220"/>
+                </a:solidFill>
+                <a:latin typeface="Segoe UI"/>
+              </a:rPr>
+              <a:t>atalho</a:t>
+            </a:r>
+            <a:r>
+              <a:rPr sz="1300" b="0" dirty="0">
+                <a:solidFill>
+                  <a:srgbClr val="0B1220"/>
+                </a:solidFill>
+                <a:latin typeface="Segoe UI"/>
+              </a:rPr>
+              <a:t> TST-GESTÃO · Primeiro </a:t>
+            </a:r>
+            <a:r>
+              <a:rPr sz="1300" b="0" dirty="0" err="1">
+                <a:solidFill>
+                  <a:srgbClr val="0B1220"/>
+                </a:solidFill>
+                <a:latin typeface="Segoe UI"/>
+              </a:rPr>
+              <a:t>acesso</a:t>
+            </a:r>
+            <a:r>
+              <a:rPr sz="1300" b="0" dirty="0">
+                <a:solidFill>
+                  <a:srgbClr val="0B1220"/>
+                </a:solidFill>
+                <a:latin typeface="Segoe UI"/>
+              </a:rPr>
+              <a:t>: admin / </a:t>
+            </a:r>
+            <a:r>
+              <a:rPr lang="pt-BR" sz="1300" b="0">
+                <a:solidFill>
+                  <a:srgbClr val="0B1220"/>
+                </a:solidFill>
+                <a:latin typeface="Segoe UI"/>
+              </a:rPr>
+              <a:t>123456</a:t>
+            </a:r>
+            <a:endParaRPr sz="1300" b="0" dirty="0">
+              <a:solidFill>
+                <a:srgbClr val="0B1220"/>
+              </a:solidFill>
+              <a:latin typeface="Segoe UI"/>
+            </a:endParaRPr>
           </a:p>
         </p:txBody>
       </p:sp>
@@ -5062,7 +5158,7 @@
 </file>
 
 <file path=ppt/slides/slide2.xml><?xml version="1.0" encoding="utf-8"?>
-<p:sld xmlns:a="http://schemas.openxmlformats.org/drawingml/2006/main" xmlns:p="http://schemas.openxmlformats.org/presentationml/2006/main" xmlns:r="http://schemas.openxmlformats.org/officeDocument/2006/relationships">
+<p:sld xmlns:a="http://schemas.openxmlformats.org/drawingml/2006/main" xmlns:r="http://schemas.openxmlformats.org/officeDocument/2006/relationships" xmlns:p="http://schemas.openxmlformats.org/presentationml/2006/main">
   <p:cSld>
     <p:bg>
       <p:bgPr>
@@ -5078,7 +5174,14 @@
         <p:cNvGrpSpPr/>
         <p:nvPr/>
       </p:nvGrpSpPr>
-      <p:grpSpPr/>
+      <p:grpSpPr>
+        <a:xfrm>
+          <a:off x="0" y="0"/>
+          <a:ext cx="0" cy="0"/>
+          <a:chOff x="0" y="0"/>
+          <a:chExt cx="0" cy="0"/>
+        </a:xfrm>
+      </p:grpSpPr>
       <p:sp>
         <p:nvSpPr>
           <p:cNvPr id="2" name="Rectangle 1"/>
@@ -5119,6 +5222,7 @@
           <a:lstStyle/>
           <a:p>
             <a:pPr algn="ctr"/>
+            <a:endParaRPr/>
           </a:p>
         </p:txBody>
       </p:sp>
@@ -5271,15 +5375,6 @@
                 <a:spcPts val="1000"/>
               </a:spcAft>
             </a:pPr>
-            <a:r>
-              <a:rPr sz="1400" b="0">
-                <a:solidFill>
-                  <a:srgbClr val="0B1220"/>
-                </a:solidFill>
-                <a:latin typeface="Segoe UI"/>
-              </a:rPr>
-              <a:t/>
-            </a:r>
             <a:r>
               <a:rPr sz="1500">
                 <a:solidFill>
@@ -5349,7 +5444,7 @@
 </file>
 
 <file path=ppt/slides/slide3.xml><?xml version="1.0" encoding="utf-8"?>
-<p:sld xmlns:a="http://schemas.openxmlformats.org/drawingml/2006/main" xmlns:p="http://schemas.openxmlformats.org/presentationml/2006/main" xmlns:r="http://schemas.openxmlformats.org/officeDocument/2006/relationships">
+<p:sld xmlns:a="http://schemas.openxmlformats.org/drawingml/2006/main" xmlns:r="http://schemas.openxmlformats.org/officeDocument/2006/relationships" xmlns:p="http://schemas.openxmlformats.org/presentationml/2006/main">
   <p:cSld>
     <p:bg>
       <p:bgPr>
@@ -5365,7 +5460,14 @@
         <p:cNvGrpSpPr/>
         <p:nvPr/>
       </p:nvGrpSpPr>
-      <p:grpSpPr/>
+      <p:grpSpPr>
+        <a:xfrm>
+          <a:off x="0" y="0"/>
+          <a:ext cx="0" cy="0"/>
+          <a:chOff x="0" y="0"/>
+          <a:chExt cx="0" cy="0"/>
+        </a:xfrm>
+      </p:grpSpPr>
       <p:sp>
         <p:nvSpPr>
           <p:cNvPr id="2" name="Rectangle 1"/>
@@ -5406,6 +5508,7 @@
           <a:lstStyle/>
           <a:p>
             <a:pPr algn="ctr"/>
+            <a:endParaRPr/>
           </a:p>
         </p:txBody>
       </p:sp>
@@ -5558,15 +5661,6 @@
                 <a:spcPts val="1000"/>
               </a:spcAft>
             </a:pPr>
-            <a:r>
-              <a:rPr sz="1400" b="0">
-                <a:solidFill>
-                  <a:srgbClr val="0B1220"/>
-                </a:solidFill>
-                <a:latin typeface="Segoe UI"/>
-              </a:rPr>
-              <a:t/>
-            </a:r>
             <a:r>
               <a:rPr sz="1500">
                 <a:solidFill>
@@ -5620,7 +5714,7 @@
 </file>
 
 <file path=ppt/slides/slide4.xml><?xml version="1.0" encoding="utf-8"?>
-<p:sld xmlns:a="http://schemas.openxmlformats.org/drawingml/2006/main" xmlns:p="http://schemas.openxmlformats.org/presentationml/2006/main" xmlns:r="http://schemas.openxmlformats.org/officeDocument/2006/relationships">
+<p:sld xmlns:a="http://schemas.openxmlformats.org/drawingml/2006/main" xmlns:r="http://schemas.openxmlformats.org/officeDocument/2006/relationships" xmlns:p="http://schemas.openxmlformats.org/presentationml/2006/main">
   <p:cSld>
     <p:bg>
       <p:bgPr>
@@ -5636,7 +5730,14 @@
         <p:cNvGrpSpPr/>
         <p:nvPr/>
       </p:nvGrpSpPr>
-      <p:grpSpPr/>
+      <p:grpSpPr>
+        <a:xfrm>
+          <a:off x="0" y="0"/>
+          <a:ext cx="0" cy="0"/>
+          <a:chOff x="0" y="0"/>
+          <a:chExt cx="0" cy="0"/>
+        </a:xfrm>
+      </p:grpSpPr>
       <p:sp>
         <p:nvSpPr>
           <p:cNvPr id="2" name="Rectangle 1"/>
@@ -5677,6 +5778,7 @@
           <a:lstStyle/>
           <a:p>
             <a:pPr algn="ctr"/>
+            <a:endParaRPr/>
           </a:p>
         </p:txBody>
       </p:sp>
@@ -5829,15 +5931,6 @@
                 <a:spcPts val="1000"/>
               </a:spcAft>
             </a:pPr>
-            <a:r>
-              <a:rPr sz="1400" b="0">
-                <a:solidFill>
-                  <a:srgbClr val="0B1220"/>
-                </a:solidFill>
-                <a:latin typeface="Segoe UI"/>
-              </a:rPr>
-              <a:t/>
-            </a:r>
             <a:r>
               <a:rPr sz="1500">
                 <a:solidFill>
@@ -5907,7 +6000,7 @@
 </file>
 
 <file path=ppt/slides/slide5.xml><?xml version="1.0" encoding="utf-8"?>
-<p:sld xmlns:a="http://schemas.openxmlformats.org/drawingml/2006/main" xmlns:p="http://schemas.openxmlformats.org/presentationml/2006/main" xmlns:r="http://schemas.openxmlformats.org/officeDocument/2006/relationships">
+<p:sld xmlns:a="http://schemas.openxmlformats.org/drawingml/2006/main" xmlns:r="http://schemas.openxmlformats.org/officeDocument/2006/relationships" xmlns:p="http://schemas.openxmlformats.org/presentationml/2006/main">
   <p:cSld>
     <p:bg>
       <p:bgPr>
@@ -5923,7 +6016,14 @@
         <p:cNvGrpSpPr/>
         <p:nvPr/>
       </p:nvGrpSpPr>
-      <p:grpSpPr/>
+      <p:grpSpPr>
+        <a:xfrm>
+          <a:off x="0" y="0"/>
+          <a:ext cx="0" cy="0"/>
+          <a:chOff x="0" y="0"/>
+          <a:chExt cx="0" cy="0"/>
+        </a:xfrm>
+      </p:grpSpPr>
       <p:sp>
         <p:nvSpPr>
           <p:cNvPr id="2" name="Rectangle 1"/>
@@ -5964,6 +6064,7 @@
           <a:lstStyle/>
           <a:p>
             <a:pPr algn="ctr"/>
+            <a:endParaRPr/>
           </a:p>
         </p:txBody>
       </p:sp>
@@ -6116,15 +6217,6 @@
                 <a:spcPts val="1000"/>
               </a:spcAft>
             </a:pPr>
-            <a:r>
-              <a:rPr sz="1400" b="0">
-                <a:solidFill>
-                  <a:srgbClr val="0B1220"/>
-                </a:solidFill>
-                <a:latin typeface="Segoe UI"/>
-              </a:rPr>
-              <a:t/>
-            </a:r>
             <a:r>
               <a:rPr sz="1500">
                 <a:solidFill>
@@ -6178,7 +6270,7 @@
 </file>
 
 <file path=ppt/slides/slide6.xml><?xml version="1.0" encoding="utf-8"?>
-<p:sld xmlns:a="http://schemas.openxmlformats.org/drawingml/2006/main" xmlns:p="http://schemas.openxmlformats.org/presentationml/2006/main" xmlns:r="http://schemas.openxmlformats.org/officeDocument/2006/relationships">
+<p:sld xmlns:a="http://schemas.openxmlformats.org/drawingml/2006/main" xmlns:r="http://schemas.openxmlformats.org/officeDocument/2006/relationships" xmlns:p="http://schemas.openxmlformats.org/presentationml/2006/main">
   <p:cSld>
     <p:bg>
       <p:bgPr>
@@ -6194,7 +6286,14 @@
         <p:cNvGrpSpPr/>
         <p:nvPr/>
       </p:nvGrpSpPr>
-      <p:grpSpPr/>
+      <p:grpSpPr>
+        <a:xfrm>
+          <a:off x="0" y="0"/>
+          <a:ext cx="0" cy="0"/>
+          <a:chOff x="0" y="0"/>
+          <a:chExt cx="0" cy="0"/>
+        </a:xfrm>
+      </p:grpSpPr>
       <p:sp>
         <p:nvSpPr>
           <p:cNvPr id="2" name="Rectangle 1"/>
@@ -6235,6 +6334,7 @@
           <a:lstStyle/>
           <a:p>
             <a:pPr algn="ctr"/>
+            <a:endParaRPr/>
           </a:p>
         </p:txBody>
       </p:sp>
@@ -6387,15 +6487,6 @@
                 <a:spcPts val="1000"/>
               </a:spcAft>
             </a:pPr>
-            <a:r>
-              <a:rPr sz="1400" b="0">
-                <a:solidFill>
-                  <a:srgbClr val="0B1220"/>
-                </a:solidFill>
-                <a:latin typeface="Segoe UI"/>
-              </a:rPr>
-              <a:t/>
-            </a:r>
             <a:r>
               <a:rPr sz="1500">
                 <a:solidFill>
@@ -6449,7 +6540,7 @@
 </file>
 
 <file path=ppt/slides/slide7.xml><?xml version="1.0" encoding="utf-8"?>
-<p:sld xmlns:a="http://schemas.openxmlformats.org/drawingml/2006/main" xmlns:p="http://schemas.openxmlformats.org/presentationml/2006/main" xmlns:r="http://schemas.openxmlformats.org/officeDocument/2006/relationships">
+<p:sld xmlns:a="http://schemas.openxmlformats.org/drawingml/2006/main" xmlns:r="http://schemas.openxmlformats.org/officeDocument/2006/relationships" xmlns:p="http://schemas.openxmlformats.org/presentationml/2006/main">
   <p:cSld>
     <p:bg>
       <p:bgPr>
@@ -6465,7 +6556,14 @@
         <p:cNvGrpSpPr/>
         <p:nvPr/>
       </p:nvGrpSpPr>
-      <p:grpSpPr/>
+      <p:grpSpPr>
+        <a:xfrm>
+          <a:off x="0" y="0"/>
+          <a:ext cx="0" cy="0"/>
+          <a:chOff x="0" y="0"/>
+          <a:chExt cx="0" cy="0"/>
+        </a:xfrm>
+      </p:grpSpPr>
       <p:sp>
         <p:nvSpPr>
           <p:cNvPr id="2" name="Rectangle 1"/>
@@ -6506,6 +6604,7 @@
           <a:lstStyle/>
           <a:p>
             <a:pPr algn="ctr"/>
+            <a:endParaRPr/>
           </a:p>
         </p:txBody>
       </p:sp>
@@ -6658,15 +6757,6 @@
                 <a:spcPts val="1000"/>
               </a:spcAft>
             </a:pPr>
-            <a:r>
-              <a:rPr sz="1400" b="0">
-                <a:solidFill>
-                  <a:srgbClr val="0B1220"/>
-                </a:solidFill>
-                <a:latin typeface="Segoe UI"/>
-              </a:rPr>
-              <a:t/>
-            </a:r>
             <a:r>
               <a:rPr sz="1500">
                 <a:solidFill>
@@ -6720,7 +6810,7 @@
 </file>
 
 <file path=ppt/slides/slide8.xml><?xml version="1.0" encoding="utf-8"?>
-<p:sld xmlns:a="http://schemas.openxmlformats.org/drawingml/2006/main" xmlns:p="http://schemas.openxmlformats.org/presentationml/2006/main" xmlns:r="http://schemas.openxmlformats.org/officeDocument/2006/relationships">
+<p:sld xmlns:a="http://schemas.openxmlformats.org/drawingml/2006/main" xmlns:r="http://schemas.openxmlformats.org/officeDocument/2006/relationships" xmlns:p="http://schemas.openxmlformats.org/presentationml/2006/main">
   <p:cSld>
     <p:bg>
       <p:bgPr>
@@ -6736,7 +6826,14 @@
         <p:cNvGrpSpPr/>
         <p:nvPr/>
       </p:nvGrpSpPr>
-      <p:grpSpPr/>
+      <p:grpSpPr>
+        <a:xfrm>
+          <a:off x="0" y="0"/>
+          <a:ext cx="0" cy="0"/>
+          <a:chOff x="0" y="0"/>
+          <a:chExt cx="0" cy="0"/>
+        </a:xfrm>
+      </p:grpSpPr>
       <p:sp>
         <p:nvSpPr>
           <p:cNvPr id="2" name="Rectangle 1"/>
@@ -6777,6 +6874,7 @@
           <a:lstStyle/>
           <a:p>
             <a:pPr algn="ctr"/>
+            <a:endParaRPr/>
           </a:p>
         </p:txBody>
       </p:sp>
@@ -6929,15 +7027,6 @@
                 <a:spcPts val="1000"/>
               </a:spcAft>
             </a:pPr>
-            <a:r>
-              <a:rPr sz="1400" b="0">
-                <a:solidFill>
-                  <a:srgbClr val="0B1220"/>
-                </a:solidFill>
-                <a:latin typeface="Segoe UI"/>
-              </a:rPr>
-              <a:t/>
-            </a:r>
             <a:r>
               <a:rPr sz="1500">
                 <a:solidFill>
@@ -7007,7 +7096,7 @@
 </file>
 
 <file path=ppt/slides/slide9.xml><?xml version="1.0" encoding="utf-8"?>
-<p:sld xmlns:a="http://schemas.openxmlformats.org/drawingml/2006/main" xmlns:p="http://schemas.openxmlformats.org/presentationml/2006/main" xmlns:r="http://schemas.openxmlformats.org/officeDocument/2006/relationships">
+<p:sld xmlns:a="http://schemas.openxmlformats.org/drawingml/2006/main" xmlns:r="http://schemas.openxmlformats.org/officeDocument/2006/relationships" xmlns:p="http://schemas.openxmlformats.org/presentationml/2006/main">
   <p:cSld>
     <p:bg>
       <p:bgPr>
@@ -7023,7 +7112,14 @@
         <p:cNvGrpSpPr/>
         <p:nvPr/>
       </p:nvGrpSpPr>
-      <p:grpSpPr/>
+      <p:grpSpPr>
+        <a:xfrm>
+          <a:off x="0" y="0"/>
+          <a:ext cx="0" cy="0"/>
+          <a:chOff x="0" y="0"/>
+          <a:chExt cx="0" cy="0"/>
+        </a:xfrm>
+      </p:grpSpPr>
       <p:sp>
         <p:nvSpPr>
           <p:cNvPr id="2" name="Rectangle 1"/>
@@ -7064,6 +7160,7 @@
           <a:lstStyle/>
           <a:p>
             <a:pPr algn="ctr"/>
+            <a:endParaRPr/>
           </a:p>
         </p:txBody>
       </p:sp>
@@ -7216,15 +7313,6 @@
                 <a:spcPts val="1000"/>
               </a:spcAft>
             </a:pPr>
-            <a:r>
-              <a:rPr sz="1400" b="0">
-                <a:solidFill>
-                  <a:srgbClr val="0B1220"/>
-                </a:solidFill>
-                <a:latin typeface="Segoe UI"/>
-              </a:rPr>
-              <a:t/>
-            </a:r>
             <a:r>
               <a:rPr sz="1500">
                 <a:solidFill>
